--- a/classes/parte-3-hacking-etico-y-pentesting-metodologia/078-movimiento-lateral-en-la-red/clase-078-presentacion.pptx
+++ b/classes/parte-3-hacking-etico-y-pentesting-metodologia/078-movimiento-lateral-en-la-red/clase-078-presentacion.pptx
@@ -17,6 +17,9 @@
     <p:sldId id="265" r:id="rId16"/>
     <p:sldId id="266" r:id="rId17"/>
     <p:sldId id="267" r:id="rId18"/>
+    <p:sldId id="268" r:id="rId19"/>
+    <p:sldId id="269" r:id="rId20"/>
+    <p:sldId id="270" r:id="rId21"/>
   </p:sldIdLst>
   <p:sldSz cx="9144000" cy="6858000" type="screen4x3"/>
   <p:notesSz cx="6858000" cy="9144000"/>
@@ -3198,7 +3201,7 @@
                   <a:srgbClr val="0B3D2E"/>
                 </a:solidFill>
               </a:rPr>
-              <a:t>⚠️ Errores comunes</a:t>
+              <a:t>✍️ Ejercicios</a:t>
             </a:r>
           </a:p>
         </p:txBody>
@@ -3236,82 +3239,82 @@
                   <a:srgbClr val="22282E"/>
                 </a:solidFill>
               </a:rPr>
-              <a:t>•  CrackMapExec no muestra Pwn3d! en ningún host — La cuenta no tiene privilegios administrativos ahí; prueba con otra credencial u otro host</a:t>
-            </a:r>
-          </a:p>
-          <a:p>
-            <a:pPr>
-              <a:spcAft>
-                <a:spcPts val="600"/>
-              </a:spcAft>
-            </a:pPr>
-            <a:r>
-              <a:rPr sz="1500">
-                <a:solidFill>
-                  <a:srgbClr val="22282E"/>
-                </a:solidFill>
-              </a:rPr>
-              <a:t>•  STATUSLOGONFAILURE al usar el hash — Formato de hash o dominio incorrecto; verifica el formato :hashNT y el nombre exacto del dominio</a:t>
-            </a:r>
-          </a:p>
-          <a:p>
-            <a:pPr>
-              <a:spcAft>
-                <a:spcPts val="600"/>
-              </a:spcAft>
-            </a:pPr>
-            <a:r>
-              <a:rPr sz="1500">
-                <a:solidFill>
-                  <a:srgbClr val="22282E"/>
-                </a:solidFill>
-              </a:rPr>
-              <a:t>•  PsExec es bloqueado por el antivirus/EDR — Comportamiento esperado; usa wmiexec, que es más sigiloso al no crear un servicio persistente</a:t>
-            </a:r>
-          </a:p>
-          <a:p>
-            <a:pPr>
-              <a:spcAft>
-                <a:spcPts val="600"/>
-              </a:spcAft>
-            </a:pPr>
-            <a:r>
-              <a:rPr sz="1500">
-                <a:solidFill>
-                  <a:srgbClr val="22282E"/>
-                </a:solidFill>
-              </a:rPr>
-              <a:t>•  evil-winrm no conecta — El puerto 5985 está cerrado o WinRM no está habilitado; confírmalo con un escaneo de puertos antes de intentar</a:t>
-            </a:r>
-          </a:p>
-          <a:p>
-            <a:pPr>
-              <a:spcAft>
-                <a:spcPts val="600"/>
-              </a:spcAft>
-            </a:pPr>
-            <a:r>
-              <a:rPr sz="1500">
-                <a:solidFill>
-                  <a:srgbClr val="22282E"/>
-                </a:solidFill>
-              </a:rPr>
-              <a:t>•  secretsdump.py devuelve una salida vacía — La cuenta no tiene privilegios administrativos suficientes en el host remoto; escala privilegios primero</a:t>
-            </a:r>
-          </a:p>
-          <a:p>
-            <a:pPr>
-              <a:spcAft>
-                <a:spcPts val="600"/>
-              </a:spcAft>
-            </a:pPr>
-            <a:r>
-              <a:rPr sz="1500">
-                <a:solidFill>
-                  <a:srgbClr val="22282E"/>
-                </a:solidFill>
-              </a:rPr>
-              <a:t>•  BloodHound no muestra ninguna ruta hacia Domain Admin — Los datos de recolección (SharpHound) están incompletos; vuelve a ejecutar la recolección con todos los métodos habilitados</a:t>
+              <a:t>•  Explica con tus propias palabras por qué NTLM permite Pass-the-Hash y qué diferencia tiene frente a Kerberos en este aspecto.</a:t>
+            </a:r>
+          </a:p>
+          <a:p>
+            <a:pPr>
+              <a:spcAft>
+                <a:spcPts val="600"/>
+              </a:spcAft>
+            </a:pPr>
+            <a:r>
+              <a:rPr sz="1500">
+                <a:solidFill>
+                  <a:srgbClr val="22282E"/>
+                </a:solidFill>
+              </a:rPr>
+              <a:t>•  Compara PsExec y wmiexec en cuanto a artefactos forenses que dejan en el host destino.</a:t>
+            </a:r>
+          </a:p>
+          <a:p>
+            <a:pPr>
+              <a:spcAft>
+                <a:spcPts val="600"/>
+              </a:spcAft>
+            </a:pPr>
+            <a:r>
+              <a:rPr sz="1500">
+                <a:solidFill>
+                  <a:srgbClr val="22282E"/>
+                </a:solidFill>
+              </a:rPr>
+              <a:t>•  Usa CrackMapExec para determinar en qué hosts de tu laboratorio una cuenta específica es administrador local.</a:t>
+            </a:r>
+          </a:p>
+          <a:p>
+            <a:pPr>
+              <a:spcAft>
+                <a:spcPts val="600"/>
+              </a:spcAft>
+            </a:pPr>
+            <a:r>
+              <a:rPr sz="1500">
+                <a:solidFill>
+                  <a:srgbClr val="22282E"/>
+                </a:solidFill>
+              </a:rPr>
+              <a:t>•  Obtén una shell con evil-winrm y ejecuta whoami /priv para verificar los privilegios disponibles.</a:t>
+            </a:r>
+          </a:p>
+          <a:p>
+            <a:pPr>
+              <a:spcAft>
+                <a:spcPts val="600"/>
+              </a:spcAft>
+            </a:pPr>
+            <a:r>
+              <a:rPr sz="1500">
+                <a:solidFill>
+                  <a:srgbClr val="22282E"/>
+                </a:solidFill>
+              </a:rPr>
+              <a:t>•  Ejecuta secretsdump.py contra un host de laboratorio y explica qué contenidos obtienes (SAM, LSA secrets, cached domain credentials).</a:t>
+            </a:r>
+          </a:p>
+          <a:p>
+            <a:pPr>
+              <a:spcAft>
+                <a:spcPts val="600"/>
+              </a:spcAft>
+            </a:pPr>
+            <a:r>
+              <a:rPr sz="1500">
+                <a:solidFill>
+                  <a:srgbClr val="22282E"/>
+                </a:solidFill>
+              </a:rPr>
+              <a:t>•  Dibuja (a mano o con una herramienta de diagramas) una cadena de movimiento lateral de tres saltos y señala en qué punto un blue team podría detectarla.</a:t>
             </a:r>
           </a:p>
         </p:txBody>
@@ -3362,7 +3365,7 @@
                   <a:srgbClr val="0B3D2E"/>
                 </a:solidFill>
               </a:rPr>
-              <a:t>❓ Preguntas frecuentes</a:t>
+              <a:t>📝 Reto verificable</a:t>
             </a:r>
           </a:p>
         </p:txBody>
@@ -3400,97 +3403,22 @@
                   <a:srgbClr val="22282E"/>
                 </a:solidFill>
               </a:rPr>
-              <a:t>•  ❓ ¿Por qué NTLM permite Pass-the-Hash y Kerberos no de la misma forma?</a:t>
-            </a:r>
-          </a:p>
-          <a:p>
-            <a:pPr>
-              <a:spcAft>
-                <a:spcPts val="600"/>
-              </a:spcAft>
-            </a:pPr>
-            <a:r>
-              <a:rPr sz="1500">
-                <a:solidFill>
-                  <a:srgbClr val="22282E"/>
-                </a:solidFill>
-              </a:rPr>
-              <a:t>•  Porque NTLM valida directamente el hash en un intercambio reto-respuesta, mientras que Kerberos usa tickets con tiempos de expiración y cifrado distinto; aun así, Kerberos tiene su propio equivalente llamado Pass-the-Ticket u Overpass-the-Hash.</a:t>
-            </a:r>
-          </a:p>
-          <a:p>
-            <a:pPr>
-              <a:spcAft>
-                <a:spcPts val="600"/>
-              </a:spcAft>
-            </a:pPr>
-            <a:r>
-              <a:rPr sz="1500">
-                <a:solidFill>
-                  <a:srgbClr val="22282E"/>
-                </a:solidFill>
-              </a:rPr>
-              <a:t>•  ❓ ¿Cuándo debo preferir wmiexec sobre PsExec?</a:t>
-            </a:r>
-          </a:p>
-          <a:p>
-            <a:pPr>
-              <a:spcAft>
-                <a:spcPts val="600"/>
-              </a:spcAft>
-            </a:pPr>
-            <a:r>
-              <a:rPr sz="1500">
-                <a:solidFill>
-                  <a:srgbClr val="22282E"/>
-                </a:solidFill>
-              </a:rPr>
-              <a:t>•  Cuando el sigilo importa: wmiexec no crea un servicio ni deja un binario en disco, mientras que PsExec sí, lo que lo hace mucho más visible para un EDR o para un analista revisando el Event Log.</a:t>
-            </a:r>
-          </a:p>
-          <a:p>
-            <a:pPr>
-              <a:spcAft>
-                <a:spcPts val="600"/>
-              </a:spcAft>
-            </a:pPr>
-            <a:r>
-              <a:rPr sz="1500">
-                <a:solidFill>
-                  <a:srgbClr val="22282E"/>
-                </a:solidFill>
-              </a:rPr>
-              <a:t>•  ❓ ¿Qué aporta BloodHound que CrackMapExec no da?</a:t>
-            </a:r>
-          </a:p>
-          <a:p>
-            <a:pPr>
-              <a:spcAft>
-                <a:spcPts val="600"/>
-              </a:spcAft>
-            </a:pPr>
-            <a:r>
-              <a:rPr sz="1500">
-                <a:solidFill>
-                  <a:srgbClr val="22282E"/>
-                </a:solidFill>
-              </a:rPr>
-              <a:t>•  CrackMapExec valida credenciales host por host; BloodHound construye el grafo completo de relaciones (sesiones, membresías de grupo, ACLs) para mostrar la ruta óptima de escalada dentro de todo el dominio, no solo host a host.</a:t>
-            </a:r>
-          </a:p>
-          <a:p>
-            <a:pPr>
-              <a:spcAft>
-                <a:spcPts val="600"/>
-              </a:spcAft>
-            </a:pPr>
-            <a:r>
-              <a:rPr sz="1500">
-                <a:solidFill>
-                  <a:srgbClr val="22282E"/>
-                </a:solidFill>
-              </a:rPr>
-              <a:t>•  ❓ ¿Cómo detecta un equipo defensivo el movimiento lateral?</a:t>
+              <a:t>•  Reto: en tu laboratorio de Active Directory propio, demuestra una cadena de movimiento lateral de al menos dos saltos partiendo de un host inicial comprometido.</a:t>
+            </a:r>
+          </a:p>
+          <a:p>
+            <a:pPr>
+              <a:spcAft>
+                <a:spcPts val="600"/>
+              </a:spcAft>
+            </a:pPr>
+            <a:r>
+              <a:rPr sz="1500">
+                <a:solidFill>
+                  <a:srgbClr val="22282E"/>
+                </a:solidFill>
+              </a:rPr>
+              <a:t>•  Criterio de aceptación: el alumno documenta los dos (o más) hosts alcanzados, la técnica exacta usada en cada salto (Pass-the-Hash con PsExec/WMI/WinRM), la credencial que permitió el salto, y una…</a:t>
             </a:r>
           </a:p>
         </p:txBody>
@@ -3541,7 +3469,7 @@
                   <a:srgbClr val="0B3D2E"/>
                 </a:solidFill>
               </a:rPr>
-              <a:t>🔗 Referencias</a:t>
+              <a:t>⚠️ Errores comunes</a:t>
             </a:r>
           </a:p>
         </p:txBody>
@@ -3579,6 +3507,349 @@
                   <a:srgbClr val="22282E"/>
                 </a:solidFill>
               </a:rPr>
+              <a:t>•  CrackMapExec no muestra Pwn3d! en ningún host — La cuenta no tiene privilegios administrativos ahí; prueba con otra credencial u otro host</a:t>
+            </a:r>
+          </a:p>
+          <a:p>
+            <a:pPr>
+              <a:spcAft>
+                <a:spcPts val="600"/>
+              </a:spcAft>
+            </a:pPr>
+            <a:r>
+              <a:rPr sz="1500">
+                <a:solidFill>
+                  <a:srgbClr val="22282E"/>
+                </a:solidFill>
+              </a:rPr>
+              <a:t>•  STATUSLOGONFAILURE al usar el hash — Formato de hash o dominio incorrecto; verifica el formato :hashNT y el nombre exacto del dominio</a:t>
+            </a:r>
+          </a:p>
+          <a:p>
+            <a:pPr>
+              <a:spcAft>
+                <a:spcPts val="600"/>
+              </a:spcAft>
+            </a:pPr>
+            <a:r>
+              <a:rPr sz="1500">
+                <a:solidFill>
+                  <a:srgbClr val="22282E"/>
+                </a:solidFill>
+              </a:rPr>
+              <a:t>•  PsExec es bloqueado por el antivirus/EDR — Comportamiento esperado; usa wmiexec, que es más sigiloso al no crear un servicio persistente</a:t>
+            </a:r>
+          </a:p>
+          <a:p>
+            <a:pPr>
+              <a:spcAft>
+                <a:spcPts val="600"/>
+              </a:spcAft>
+            </a:pPr>
+            <a:r>
+              <a:rPr sz="1500">
+                <a:solidFill>
+                  <a:srgbClr val="22282E"/>
+                </a:solidFill>
+              </a:rPr>
+              <a:t>•  evil-winrm no conecta — El puerto 5985 está cerrado o WinRM no está habilitado; confírmalo con un escaneo de puertos antes de intentar</a:t>
+            </a:r>
+          </a:p>
+          <a:p>
+            <a:pPr>
+              <a:spcAft>
+                <a:spcPts val="600"/>
+              </a:spcAft>
+            </a:pPr>
+            <a:r>
+              <a:rPr sz="1500">
+                <a:solidFill>
+                  <a:srgbClr val="22282E"/>
+                </a:solidFill>
+              </a:rPr>
+              <a:t>•  secretsdump.py devuelve una salida vacía — La cuenta no tiene privilegios administrativos suficientes en el host remoto; escala privilegios primero</a:t>
+            </a:r>
+          </a:p>
+          <a:p>
+            <a:pPr>
+              <a:spcAft>
+                <a:spcPts val="600"/>
+              </a:spcAft>
+            </a:pPr>
+            <a:r>
+              <a:rPr sz="1500">
+                <a:solidFill>
+                  <a:srgbClr val="22282E"/>
+                </a:solidFill>
+              </a:rPr>
+              <a:t>•  BloodHound no muestra ninguna ruta hacia Domain Admin — Los datos de recolección (SharpHound) están incompletos; vuelve a ejecutar la recolección con todos los métodos habilitados</a:t>
+            </a:r>
+          </a:p>
+        </p:txBody>
+      </p:sp>
+    </p:spTree>
+  </p:cSld>
+  <p:clrMapOvr>
+    <a:masterClrMapping/>
+  </p:clrMapOvr>
+</p:sld>
+</file>
+
+<file path=ppt/slides/slide13.xml><?xml version="1.0" encoding="utf-8"?>
+<p:sld xmlns:a="http://schemas.openxmlformats.org/drawingml/2006/main" xmlns:p="http://schemas.openxmlformats.org/presentationml/2006/main" xmlns:r="http://schemas.openxmlformats.org/officeDocument/2006/relationships">
+  <p:cSld>
+    <p:spTree>
+      <p:nvGrpSpPr>
+        <p:cNvPr id="1" name=""/>
+        <p:cNvGrpSpPr/>
+        <p:nvPr/>
+      </p:nvGrpSpPr>
+      <p:grpSpPr/>
+      <p:sp>
+        <p:nvSpPr>
+          <p:cNvPr id="2" name="TextBox 1"/>
+          <p:cNvSpPr txBox="1"/>
+          <p:nvPr/>
+        </p:nvSpPr>
+        <p:spPr>
+          <a:xfrm>
+            <a:off x="457200" y="320040"/>
+            <a:ext cx="8229600" cy="822960"/>
+          </a:xfrm>
+          <a:prstGeom prst="rect">
+            <a:avLst/>
+          </a:prstGeom>
+          <a:noFill/>
+        </p:spPr>
+        <p:txBody>
+          <a:bodyPr wrap="square">
+            <a:spAutoFit/>
+          </a:bodyPr>
+          <a:lstStyle/>
+          <a:p>
+            <a:r>
+              <a:rPr sz="2600" b="1">
+                <a:solidFill>
+                  <a:srgbClr val="0B3D2E"/>
+                </a:solidFill>
+              </a:rPr>
+              <a:t>❓ Preguntas frecuentes</a:t>
+            </a:r>
+          </a:p>
+        </p:txBody>
+      </p:sp>
+      <p:sp>
+        <p:nvSpPr>
+          <p:cNvPr id="3" name="TextBox 2"/>
+          <p:cNvSpPr txBox="1"/>
+          <p:nvPr/>
+        </p:nvSpPr>
+        <p:spPr>
+          <a:xfrm>
+            <a:off x="457200" y="1280160"/>
+            <a:ext cx="8229600" cy="4937760"/>
+          </a:xfrm>
+          <a:prstGeom prst="rect">
+            <a:avLst/>
+          </a:prstGeom>
+          <a:noFill/>
+        </p:spPr>
+        <p:txBody>
+          <a:bodyPr wrap="square">
+            <a:spAutoFit/>
+          </a:bodyPr>
+          <a:lstStyle/>
+          <a:p>
+            <a:pPr>
+              <a:spcAft>
+                <a:spcPts val="600"/>
+              </a:spcAft>
+            </a:pPr>
+            <a:r>
+              <a:rPr sz="1500">
+                <a:solidFill>
+                  <a:srgbClr val="22282E"/>
+                </a:solidFill>
+              </a:rPr>
+              <a:t>•  ❓ ¿Por qué NTLM permite Pass-the-Hash y Kerberos no de la misma forma?</a:t>
+            </a:r>
+          </a:p>
+          <a:p>
+            <a:pPr>
+              <a:spcAft>
+                <a:spcPts val="600"/>
+              </a:spcAft>
+            </a:pPr>
+            <a:r>
+              <a:rPr sz="1500">
+                <a:solidFill>
+                  <a:srgbClr val="22282E"/>
+                </a:solidFill>
+              </a:rPr>
+              <a:t>•  Porque NTLM valida directamente el hash en un intercambio reto-respuesta, mientras que Kerberos usa tickets con tiempos de expiración y cifrado distinto; aun así, Kerberos tiene su propio equivalente…</a:t>
+            </a:r>
+          </a:p>
+          <a:p>
+            <a:pPr>
+              <a:spcAft>
+                <a:spcPts val="600"/>
+              </a:spcAft>
+            </a:pPr>
+            <a:r>
+              <a:rPr sz="1500">
+                <a:solidFill>
+                  <a:srgbClr val="22282E"/>
+                </a:solidFill>
+              </a:rPr>
+              <a:t>•  ❓ ¿Cuándo debo preferir wmiexec sobre PsExec?</a:t>
+            </a:r>
+          </a:p>
+          <a:p>
+            <a:pPr>
+              <a:spcAft>
+                <a:spcPts val="600"/>
+              </a:spcAft>
+            </a:pPr>
+            <a:r>
+              <a:rPr sz="1500">
+                <a:solidFill>
+                  <a:srgbClr val="22282E"/>
+                </a:solidFill>
+              </a:rPr>
+              <a:t>•  Cuando el sigilo importa: wmiexec no crea un servicio ni deja un binario en disco, mientras que PsExec sí, lo que lo hace mucho más visible para un EDR o para un analista revisando el Event Log.</a:t>
+            </a:r>
+          </a:p>
+          <a:p>
+            <a:pPr>
+              <a:spcAft>
+                <a:spcPts val="600"/>
+              </a:spcAft>
+            </a:pPr>
+            <a:r>
+              <a:rPr sz="1500">
+                <a:solidFill>
+                  <a:srgbClr val="22282E"/>
+                </a:solidFill>
+              </a:rPr>
+              <a:t>•  ❓ ¿Qué aporta BloodHound que CrackMapExec no da?</a:t>
+            </a:r>
+          </a:p>
+          <a:p>
+            <a:pPr>
+              <a:spcAft>
+                <a:spcPts val="600"/>
+              </a:spcAft>
+            </a:pPr>
+            <a:r>
+              <a:rPr sz="1500">
+                <a:solidFill>
+                  <a:srgbClr val="22282E"/>
+                </a:solidFill>
+              </a:rPr>
+              <a:t>•  CrackMapExec valida credenciales host por host; BloodHound construye el grafo completo de relaciones (sesiones, membresías de grupo, ACLs) para mostrar la ruta óptima de escalada dentro de todo el…</a:t>
+            </a:r>
+          </a:p>
+          <a:p>
+            <a:pPr>
+              <a:spcAft>
+                <a:spcPts val="600"/>
+              </a:spcAft>
+            </a:pPr>
+            <a:r>
+              <a:rPr sz="1500">
+                <a:solidFill>
+                  <a:srgbClr val="22282E"/>
+                </a:solidFill>
+              </a:rPr>
+              <a:t>•  ❓ ¿Cómo detecta un equipo defensivo el movimiento lateral?</a:t>
+            </a:r>
+          </a:p>
+        </p:txBody>
+      </p:sp>
+    </p:spTree>
+  </p:cSld>
+  <p:clrMapOvr>
+    <a:masterClrMapping/>
+  </p:clrMapOvr>
+</p:sld>
+</file>
+
+<file path=ppt/slides/slide14.xml><?xml version="1.0" encoding="utf-8"?>
+<p:sld xmlns:a="http://schemas.openxmlformats.org/drawingml/2006/main" xmlns:p="http://schemas.openxmlformats.org/presentationml/2006/main" xmlns:r="http://schemas.openxmlformats.org/officeDocument/2006/relationships">
+  <p:cSld>
+    <p:spTree>
+      <p:nvGrpSpPr>
+        <p:cNvPr id="1" name=""/>
+        <p:cNvGrpSpPr/>
+        <p:nvPr/>
+      </p:nvGrpSpPr>
+      <p:grpSpPr/>
+      <p:sp>
+        <p:nvSpPr>
+          <p:cNvPr id="2" name="TextBox 1"/>
+          <p:cNvSpPr txBox="1"/>
+          <p:nvPr/>
+        </p:nvSpPr>
+        <p:spPr>
+          <a:xfrm>
+            <a:off x="457200" y="320040"/>
+            <a:ext cx="8229600" cy="822960"/>
+          </a:xfrm>
+          <a:prstGeom prst="rect">
+            <a:avLst/>
+          </a:prstGeom>
+          <a:noFill/>
+        </p:spPr>
+        <p:txBody>
+          <a:bodyPr wrap="square">
+            <a:spAutoFit/>
+          </a:bodyPr>
+          <a:lstStyle/>
+          <a:p>
+            <a:r>
+              <a:rPr sz="2600" b="1">
+                <a:solidFill>
+                  <a:srgbClr val="0B3D2E"/>
+                </a:solidFill>
+              </a:rPr>
+              <a:t>🔗 Referencias</a:t>
+            </a:r>
+          </a:p>
+        </p:txBody>
+      </p:sp>
+      <p:sp>
+        <p:nvSpPr>
+          <p:cNvPr id="3" name="TextBox 2"/>
+          <p:cNvSpPr txBox="1"/>
+          <p:nvPr/>
+        </p:nvSpPr>
+        <p:spPr>
+          <a:xfrm>
+            <a:off x="457200" y="1280160"/>
+            <a:ext cx="8229600" cy="4937760"/>
+          </a:xfrm>
+          <a:prstGeom prst="rect">
+            <a:avLst/>
+          </a:prstGeom>
+          <a:noFill/>
+        </p:spPr>
+        <p:txBody>
+          <a:bodyPr wrap="square">
+            <a:spAutoFit/>
+          </a:bodyPr>
+          <a:lstStyle/>
+          <a:p>
+            <a:pPr>
+              <a:spcAft>
+                <a:spcPts val="600"/>
+              </a:spcAft>
+            </a:pPr>
+            <a:r>
+              <a:rPr sz="1500">
+                <a:solidFill>
+                  <a:srgbClr val="22282E"/>
+                </a:solidFill>
+              </a:rPr>
               <a:t>•  MITRE ATT&amp;CK, TA0008 Lateral Movement — &lt;https://attack.mitre.org/tactics/TA0008/&gt;</a:t>
             </a:r>
           </a:p>
@@ -3644,6 +3915,81 @@
           </a:p>
         </p:txBody>
       </p:sp>
+    </p:spTree>
+  </p:cSld>
+  <p:clrMapOvr>
+    <a:masterClrMapping/>
+  </p:clrMapOvr>
+</p:sld>
+</file>
+
+<file path=ppt/slides/slide15.xml><?xml version="1.0" encoding="utf-8"?>
+<p:sld xmlns:a="http://schemas.openxmlformats.org/drawingml/2006/main" xmlns:p="http://schemas.openxmlformats.org/presentationml/2006/main" xmlns:r="http://schemas.openxmlformats.org/officeDocument/2006/relationships">
+  <p:cSld>
+    <p:spTree>
+      <p:nvGrpSpPr>
+        <p:cNvPr id="1" name=""/>
+        <p:cNvGrpSpPr/>
+        <p:nvPr/>
+      </p:nvGrpSpPr>
+      <p:grpSpPr/>
+      <p:sp>
+        <p:nvSpPr>
+          <p:cNvPr id="2" name="TextBox 1"/>
+          <p:cNvSpPr txBox="1"/>
+          <p:nvPr/>
+        </p:nvSpPr>
+        <p:spPr>
+          <a:xfrm>
+            <a:off x="457200" y="274320"/>
+            <a:ext cx="8229600" cy="640080"/>
+          </a:xfrm>
+          <a:prstGeom prst="rect">
+            <a:avLst/>
+          </a:prstGeom>
+          <a:noFill/>
+        </p:spPr>
+        <p:txBody>
+          <a:bodyPr wrap="square">
+            <a:spAutoFit/>
+          </a:bodyPr>
+          <a:lstStyle/>
+          <a:p>
+            <a:r>
+              <a:rPr sz="2200" b="1">
+                <a:solidFill>
+                  <a:srgbClr val="0B3D2E"/>
+                </a:solidFill>
+              </a:rPr>
+              <a:t>Diagrama de la clase</a:t>
+            </a:r>
+          </a:p>
+        </p:txBody>
+      </p:sp>
+      <p:pic>
+        <p:nvPicPr>
+          <p:cNvPr id="3" name="Picture 2" descr="5b199c1320c3daf1.png"/>
+          <p:cNvPicPr>
+            <a:picLocks noChangeAspect="1"/>
+          </p:cNvPicPr>
+          <p:nvPr/>
+        </p:nvPicPr>
+        <p:blipFill>
+          <a:blip r:embed="rId2"/>
+          <a:stretch>
+            <a:fillRect/>
+          </a:stretch>
+        </p:blipFill>
+        <p:spPr>
+          <a:xfrm>
+            <a:off x="457200" y="2313432"/>
+            <a:ext cx="8229600" cy="2871216"/>
+          </a:xfrm>
+          <a:prstGeom prst="rect">
+            <a:avLst/>
+          </a:prstGeom>
+        </p:spPr>
+      </p:pic>
     </p:spTree>
   </p:cSld>
   <p:clrMapOvr>
@@ -3728,7 +4074,7 @@
                   <a:srgbClr val="22282E"/>
                 </a:solidFill>
               </a:rPr>
-              <a:t>•  El alumno aprenderá a extender el acceso desde un primer host comprometido hacia otros sistemas de una red interna o de un dominio Active Directory, reutilizando credenciales y hashes obtenidos de forma responsable, usando PsExec, WMI/WinRM y técnicas de Pass-the-Hash, y a mapear conceptualmente esas rutas con BloodHound, entendiendo el valor defensivo de detectar estos movimientos.</a:t>
+              <a:t>•  El alumno aprenderá a extender el acceso desde un primer host comprometido hacia otros sistemas de una red interna o de un dominio Active Directory, reutilizando credenciales y hashes obtenidos de…</a:t>
             </a:r>
           </a:p>
         </p:txBody>
@@ -4137,7 +4483,7 @@
                   <a:srgbClr val="0B3D2E"/>
                 </a:solidFill>
               </a:rPr>
-              <a:t>📖 Definiciones y características</a:t>
+              <a:t>🧠 Explicación en profundidad</a:t>
             </a:r>
           </a:p>
         </p:txBody>
@@ -4175,97 +4521,97 @@
                   <a:srgbClr val="22282E"/>
                 </a:solidFill>
               </a:rPr>
-              <a:t>•  Pass-the-Hash (PtH): técnica de autenticación que usa el hash NTLM de una contraseña en lugar de la contraseña en texto claro. Característica clave: NTLM valida el hash, no exige el secreto original, por lo que robar el hash basta para autenticarse.</a:t>
-            </a:r>
-          </a:p>
-          <a:p>
-            <a:pPr>
-              <a:spcAft>
-                <a:spcPts val="600"/>
-              </a:spcAft>
-            </a:pPr>
-            <a:r>
-              <a:rPr sz="1500">
-                <a:solidFill>
-                  <a:srgbClr val="22282E"/>
-                </a:solidFill>
-              </a:rPr>
-              <a:t>•  Enfoque defensivo: deshabilitar NTLM donde sea posible en favor de Kerberos, y aplicar LAPS para rotar contraseñas locales, limita drásticamente el impacto de un hash robado.</a:t>
-            </a:r>
-          </a:p>
-          <a:p>
-            <a:pPr>
-              <a:spcAft>
-                <a:spcPts val="600"/>
-              </a:spcAft>
-            </a:pPr>
-            <a:r>
-              <a:rPr sz="1500">
-                <a:solidFill>
-                  <a:srgbClr val="22282E"/>
-                </a:solidFill>
-              </a:rPr>
-              <a:t>•  PsExec: utilidad (originalmente de Sysinternals, reimplementada en impacket como psexec.py) que ejecuta comandos remotos vía SMB creando un servicio temporal en el host destino. Característica clave: es efectiva pero ruidosa, ya que deja artefactos de creación de servicio en el Event Log.</a:t>
-            </a:r>
-          </a:p>
-          <a:p>
-            <a:pPr>
-              <a:spcAft>
-                <a:spcPts val="600"/>
-              </a:spcAft>
-            </a:pPr>
-            <a:r>
-              <a:rPr sz="1500">
-                <a:solidFill>
-                  <a:srgbClr val="22282E"/>
-                </a:solidFill>
-              </a:rPr>
-              <a:t>•  Enfoque defensivo: alertar sobre el Event ID 7045 (instalación de nuevo servicio) en hosts que no son servidores de administración es una detección de alto valor y bajo costo.</a:t>
-            </a:r>
-          </a:p>
-          <a:p>
-            <a:pPr>
-              <a:spcAft>
-                <a:spcPts val="600"/>
-              </a:spcAft>
-            </a:pPr>
-            <a:r>
-              <a:rPr sz="1500">
-                <a:solidFill>
-                  <a:srgbClr val="22282E"/>
-                </a:solidFill>
-              </a:rPr>
-              <a:t>•  WMI (Windows Management Instrumentation): infraestructura de administración remota de Windows; wmiexec.py de impacket la usa para ejecución de comandos sin crear un servicio persistente. Característica clave: más sigilosa que PsExec porque no deja un binario ni un servicio en disco.</a:t>
-            </a:r>
-          </a:p>
-          <a:p>
-            <a:pPr>
-              <a:spcAft>
-                <a:spcPts val="600"/>
-              </a:spcAft>
-            </a:pPr>
-            <a:r>
-              <a:rPr sz="1500">
-                <a:solidFill>
-                  <a:srgbClr val="22282E"/>
-                </a:solidFill>
-              </a:rPr>
-              <a:t>•  Enfoque defensivo: registrar y auditar el tráfico WMI (puerto 135 + RPC dinámico) entre estaciones de trabajo, algo poco común en tráfico legítimo día a día, ayuda a detectar este vector.</a:t>
-            </a:r>
-          </a:p>
-          <a:p>
-            <a:pPr>
-              <a:spcAft>
-                <a:spcPts val="600"/>
-              </a:spcAft>
-            </a:pPr>
-            <a:r>
-              <a:rPr sz="1500">
-                <a:solidFill>
-                  <a:srgbClr val="22282E"/>
-                </a:solidFill>
-              </a:rPr>
-              <a:t>•  WinRM (Windows Remote Management): protocolo de gestión remota sobre HTTP(S) (puertos 5985/5986); evil-winrm ofrece una shell interactiva cómoda. Característica clave: requiere que el servicio WinRM esté habilitado y accesible en el destino.</a:t>
+              <a:t>•  Comprometer una máquina rara vez es el fin. El objetivo real suele estar en otro sitio —el</a:t>
+            </a:r>
+          </a:p>
+          <a:p>
+            <a:pPr>
+              <a:spcAft>
+                <a:spcPts val="600"/>
+              </a:spcAft>
+            </a:pPr>
+            <a:r>
+              <a:rPr sz="1500">
+                <a:solidFill>
+                  <a:srgbClr val="22282E"/>
+                </a:solidFill>
+              </a:rPr>
+              <a:t>•  controlador de dominio, el servidor de bases de datos, los datos de negocio—, y llegar allí</a:t>
+            </a:r>
+          </a:p>
+          <a:p>
+            <a:pPr>
+              <a:spcAft>
+                <a:spcPts val="600"/>
+              </a:spcAft>
+            </a:pPr>
+            <a:r>
+              <a:rPr sz="1500">
+                <a:solidFill>
+                  <a:srgbClr val="22282E"/>
+                </a:solidFill>
+              </a:rPr>
+              <a:t>•  requiere movimiento lateral: usar el acceso y las credenciales de un host para</a:t>
+            </a:r>
+          </a:p>
+          <a:p>
+            <a:pPr>
+              <a:spcAft>
+                <a:spcPts val="600"/>
+              </a:spcAft>
+            </a:pPr>
+            <a:r>
+              <a:rPr sz="1500">
+                <a:solidFill>
+                  <a:srgbClr val="22282E"/>
+                </a:solidFill>
+              </a:rPr>
+              <a:t>•  autenticarse en el siguiente, y así sucesivamente. En un entorno Windows con Active</a:t>
+            </a:r>
+          </a:p>
+          <a:p>
+            <a:pPr>
+              <a:spcAft>
+                <a:spcPts val="600"/>
+              </a:spcAft>
+            </a:pPr>
+            <a:r>
+              <a:rPr sz="1500">
+                <a:solidFill>
+                  <a:srgbClr val="22282E"/>
+                </a:solidFill>
+              </a:rPr>
+              <a:t>•  Directory, esto es la esencia del ataque, y su combustible son las credenciales</a:t>
+            </a:r>
+          </a:p>
+          <a:p>
+            <a:pPr>
+              <a:spcAft>
+                <a:spcPts val="600"/>
+              </a:spcAft>
+            </a:pPr>
+            <a:r>
+              <a:rPr sz="1500">
+                <a:solidFill>
+                  <a:srgbClr val="22282E"/>
+                </a:solidFill>
+              </a:rPr>
+              <a:t>•  recolectadas en la post-explotación (la Clase 074).</a:t>
+            </a:r>
+          </a:p>
+          <a:p>
+            <a:pPr>
+              <a:spcAft>
+                <a:spcPts val="600"/>
+              </a:spcAft>
+            </a:pPr>
+            <a:r>
+              <a:rPr sz="1500">
+                <a:solidFill>
+                  <a:srgbClr val="22282E"/>
+                </a:solidFill>
+              </a:rPr>
+              <a:t>•  El concepto que hay que interiorizar antes que ningún comando es que en Windows, con el</a:t>
             </a:r>
           </a:p>
         </p:txBody>
@@ -4316,7 +4662,7 @@
                   <a:srgbClr val="0B3D2E"/>
                 </a:solidFill>
               </a:rPr>
-              <a:t>🧰 Herramientas y preparación</a:t>
+              <a:t>📖 Definiciones y características</a:t>
             </a:r>
           </a:p>
         </p:txBody>
@@ -4354,97 +4700,97 @@
                   <a:srgbClr val="22282E"/>
                 </a:solidFill>
               </a:rPr>
-              <a:t>•  Entorno de laboratorio: un mini-dominio Active Directory propio (un controlador de dominio y al menos dos estaciones de trabajo), montado en VMs propias o en un rango de laboratorio como los de HackTheBox Pro Labs o TryHackMe.</a:t>
-            </a:r>
-          </a:p>
-          <a:p>
-            <a:pPr>
-              <a:spcAft>
-                <a:spcPts val="600"/>
-              </a:spcAft>
-            </a:pPr>
-            <a:r>
-              <a:rPr sz="1500">
-                <a:solidFill>
-                  <a:srgbClr val="22282E"/>
-                </a:solidFill>
-              </a:rPr>
-              <a:t>•  Impacket: pip install impacket o pipx install impacket; incluye psexec.py, wmiexec.py, smbexec.py y secretsdump.py.</a:t>
-            </a:r>
-          </a:p>
-          <a:p>
-            <a:pPr>
-              <a:spcAft>
-                <a:spcPts val="600"/>
-              </a:spcAft>
-            </a:pPr>
-            <a:r>
-              <a:rPr sz="1500">
-                <a:solidFill>
-                  <a:srgbClr val="22282E"/>
-                </a:solidFill>
-              </a:rPr>
-              <a:t>•  CrackMapExec (o su fork mantenido, NetExec): pip install crackmapexec o pip install netexec.</a:t>
-            </a:r>
-          </a:p>
-          <a:p>
-            <a:pPr>
-              <a:spcAft>
-                <a:spcPts val="600"/>
-              </a:spcAft>
-            </a:pPr>
-            <a:r>
-              <a:rPr sz="1500">
-                <a:solidFill>
-                  <a:srgbClr val="22282E"/>
-                </a:solidFill>
-              </a:rPr>
-              <a:t>•  evil-winrm: gem install evil-winrm, requiere Ruby instalado.</a:t>
-            </a:r>
-          </a:p>
-          <a:p>
-            <a:pPr>
-              <a:spcAft>
-                <a:spcPts val="600"/>
-              </a:spcAft>
-            </a:pPr>
-            <a:r>
-              <a:rPr sz="1500">
-                <a:solidFill>
-                  <a:srgbClr val="22282E"/>
-                </a:solidFill>
-              </a:rPr>
-              <a:t>•  Credenciales o hashes obtenidos de forma legítima en clases previas (por ejemplo, mediante secretsdump.py tras una escalada de privilegios autorizada).</a:t>
-            </a:r>
-          </a:p>
-          <a:p>
-            <a:pPr>
-              <a:spcAft>
-                <a:spcPts val="600"/>
-              </a:spcAft>
-            </a:pPr>
-            <a:r>
-              <a:rPr sz="1500">
-                <a:solidFill>
-                  <a:srgbClr val="22282E"/>
-                </a:solidFill>
-              </a:rPr>
-              <a:t>•  BloodHound + SharpHound/bloodhound-python: recolector de datos de AD (bloodhound-python -u user -p pass -d dominio.local -ns 10.10.10.5 -c all) y su interfaz de análisis en Neo4j.</a:t>
-            </a:r>
-          </a:p>
-          <a:p>
-            <a:pPr>
-              <a:spcAft>
-                <a:spcPts val="600"/>
-              </a:spcAft>
-            </a:pPr>
-            <a:r>
-              <a:rPr sz="1500">
-                <a:solidFill>
-                  <a:srgbClr val="22282E"/>
-                </a:solidFill>
-              </a:rPr>
-              <a:t>•  Wireshark o tcpdump (opcional): útil para observar en el laboratorio el tráfico SMB/WMI/WinRM generado por cada técnica y entender su huella en la red.</a:t>
+              <a:t>•  Pass-the-Hash (PtH): técnica de autenticación que usa el hash NTLM de una contraseña en lugar de la contraseña en texto claro. Característica clave: NTLM valida el hash, no exige el secreto original…</a:t>
+            </a:r>
+          </a:p>
+          <a:p>
+            <a:pPr>
+              <a:spcAft>
+                <a:spcPts val="600"/>
+              </a:spcAft>
+            </a:pPr>
+            <a:r>
+              <a:rPr sz="1500">
+                <a:solidFill>
+                  <a:srgbClr val="22282E"/>
+                </a:solidFill>
+              </a:rPr>
+              <a:t>•  Enfoque defensivo: deshabilitar NTLM donde sea posible en favor de Kerberos, y aplicar LAPS para rotar contraseñas locales, limita drásticamente el impacto de un hash robado.</a:t>
+            </a:r>
+          </a:p>
+          <a:p>
+            <a:pPr>
+              <a:spcAft>
+                <a:spcPts val="600"/>
+              </a:spcAft>
+            </a:pPr>
+            <a:r>
+              <a:rPr sz="1500">
+                <a:solidFill>
+                  <a:srgbClr val="22282E"/>
+                </a:solidFill>
+              </a:rPr>
+              <a:t>•  PsExec: utilidad (originalmente de Sysinternals, reimplementada en impacket como psexec.py) que ejecuta comandos remotos vía SMB creando un servicio temporal en el host destino. Característica clave…</a:t>
+            </a:r>
+          </a:p>
+          <a:p>
+            <a:pPr>
+              <a:spcAft>
+                <a:spcPts val="600"/>
+              </a:spcAft>
+            </a:pPr>
+            <a:r>
+              <a:rPr sz="1500">
+                <a:solidFill>
+                  <a:srgbClr val="22282E"/>
+                </a:solidFill>
+              </a:rPr>
+              <a:t>•  Enfoque defensivo: alertar sobre el Event ID 7045 (instalación de nuevo servicio) en hosts que no son servidores de administración es una detección de alto valor y bajo costo.</a:t>
+            </a:r>
+          </a:p>
+          <a:p>
+            <a:pPr>
+              <a:spcAft>
+                <a:spcPts val="600"/>
+              </a:spcAft>
+            </a:pPr>
+            <a:r>
+              <a:rPr sz="1500">
+                <a:solidFill>
+                  <a:srgbClr val="22282E"/>
+                </a:solidFill>
+              </a:rPr>
+              <a:t>•  WMI (Windows Management Instrumentation): infraestructura de administración remota de Windows; wmiexec.py de impacket la usa para ejecución de comandos sin crear un servicio persistente.…</a:t>
+            </a:r>
+          </a:p>
+          <a:p>
+            <a:pPr>
+              <a:spcAft>
+                <a:spcPts val="600"/>
+              </a:spcAft>
+            </a:pPr>
+            <a:r>
+              <a:rPr sz="1500">
+                <a:solidFill>
+                  <a:srgbClr val="22282E"/>
+                </a:solidFill>
+              </a:rPr>
+              <a:t>•  Enfoque defensivo: registrar y auditar el tráfico WMI (puerto 135 + RPC dinámico) entre estaciones de trabajo, algo poco común en tráfico legítimo día a día, ayuda a detectar este vector.</a:t>
+            </a:r>
+          </a:p>
+          <a:p>
+            <a:pPr>
+              <a:spcAft>
+                <a:spcPts val="600"/>
+              </a:spcAft>
+            </a:pPr>
+            <a:r>
+              <a:rPr sz="1500">
+                <a:solidFill>
+                  <a:srgbClr val="22282E"/>
+                </a:solidFill>
+              </a:rPr>
+              <a:t>•  WinRM (Windows Remote Management): protocolo de gestión remota sobre HTTP(S) (puertos 5985/5986); evil-winrm ofrece una shell interactiva cómoda. Característica clave: requiere que el servicio WinRM…</a:t>
             </a:r>
           </a:p>
         </p:txBody>
@@ -4495,7 +4841,7 @@
                   <a:srgbClr val="0B3D2E"/>
                 </a:solidFill>
               </a:rPr>
-              <a:t>🧪 Laboratorio guiado</a:t>
+              <a:t>📔 Glosario</a:t>
             </a:r>
           </a:p>
         </p:txBody>
@@ -4533,97 +4879,97 @@
                   <a:srgbClr val="22282E"/>
                 </a:solidFill>
               </a:rPr>
-              <a:t>•  Con un hash NTLM obtenido (formato LM:NT), valida en qué hosts de la subred la credencial es admin local: crackmapexec smb 192.168.56.0/24 -u administrador -H &lt;hashNT&gt;.</a:t>
-            </a:r>
-          </a:p>
-          <a:p>
-            <a:pPr>
-              <a:spcAft>
-                <a:spcPts val="600"/>
-              </a:spcAft>
-            </a:pPr>
-            <a:r>
-              <a:rPr sz="1500">
-                <a:solidFill>
-                  <a:srgbClr val="22282E"/>
-                </a:solidFill>
-              </a:rPr>
-              <a:t>•  Los hosts marcados con Pwn3d! confirman privilegios administrativos; anótalos como objetivos de movimiento lateral.</a:t>
-            </a:r>
-          </a:p>
-          <a:p>
-            <a:pPr>
-              <a:spcAft>
-                <a:spcPts val="600"/>
-              </a:spcAft>
-            </a:pPr>
-            <a:r>
-              <a:rPr sz="1500">
-                <a:solidFill>
-                  <a:srgbClr val="22282E"/>
-                </a:solidFill>
-              </a:rPr>
-              <a:t>•  Ejecuta un comando remoto de forma sigilosa con wmiexec: wmiexec.py -hashes :&lt;hashNT&gt; dominio/administrador@192.168.56.20.</a:t>
-            </a:r>
-          </a:p>
-          <a:p>
-            <a:pPr>
-              <a:spcAft>
-                <a:spcPts val="600"/>
-              </a:spcAft>
-            </a:pPr>
-            <a:r>
-              <a:rPr sz="1500">
-                <a:solidFill>
-                  <a:srgbClr val="22282E"/>
-                </a:solidFill>
-              </a:rPr>
-              <a:t>•  Alternativamente, usa PsExec (más ruidoso, deja un servicio): psexec.py dominio/administrador@192.168.56.20 -hashes :&lt;hashNT&gt;.</a:t>
-            </a:r>
-          </a:p>
-          <a:p>
-            <a:pPr>
-              <a:spcAft>
-                <a:spcPts val="600"/>
-              </a:spcAft>
-            </a:pPr>
-            <a:r>
-              <a:rPr sz="1500">
-                <a:solidFill>
-                  <a:srgbClr val="22282E"/>
-                </a:solidFill>
-              </a:rPr>
-              <a:t>•  Si el puerto 5985 está abierto, obtén una shell interactiva con evil-winrm: evil-winrm -i 192.168.56.20 -u administrador -H &lt;hashNT&gt;.</a:t>
-            </a:r>
-          </a:p>
-          <a:p>
-            <a:pPr>
-              <a:spcAft>
-                <a:spcPts val="600"/>
-              </a:spcAft>
-            </a:pPr>
-            <a:r>
-              <a:rPr sz="1500">
-                <a:solidFill>
-                  <a:srgbClr val="22282E"/>
-                </a:solidFill>
-              </a:rPr>
-              <a:t>•  Vuelca credenciales adicionales del nuevo host: secretsdump.py dominio/administrador@192.168.56.20 -hashes :&lt;hashNT&gt;.</a:t>
-            </a:r>
-          </a:p>
-          <a:p>
-            <a:pPr>
-              <a:spcAft>
-                <a:spcPts val="600"/>
-              </a:spcAft>
-            </a:pPr>
-            <a:r>
-              <a:rPr sz="1500">
-                <a:solidFill>
-                  <a:srgbClr val="22282E"/>
-                </a:solidFill>
-              </a:rPr>
-              <a:t>•  Con las credenciales recién obtenidas, repite el proceso hacia un tercer host para construir una cadena de al menos dos saltos.</a:t>
+              <a:t>•  Término — Definición concisa</a:t>
+            </a:r>
+          </a:p>
+          <a:p>
+            <a:pPr>
+              <a:spcAft>
+                <a:spcPts val="600"/>
+              </a:spcAft>
+            </a:pPr>
+            <a:r>
+              <a:rPr sz="1500">
+                <a:solidFill>
+                  <a:srgbClr val="22282E"/>
+                </a:solidFill>
+              </a:rPr>
+              <a:t>•  Movimiento lateral — Usar un host comprometido para autenticarse en el siguiente</a:t>
+            </a:r>
+          </a:p>
+          <a:p>
+            <a:pPr>
+              <a:spcAft>
+                <a:spcPts val="600"/>
+              </a:spcAft>
+            </a:pPr>
+            <a:r>
+              <a:rPr sz="1500">
+                <a:solidFill>
+                  <a:srgbClr val="22282E"/>
+                </a:solidFill>
+              </a:rPr>
+              <a:t>•  NTLM — Protocolo de autenticación de Windows basado en hash</a:t>
+            </a:r>
+          </a:p>
+          <a:p>
+            <a:pPr>
+              <a:spcAft>
+                <a:spcPts val="600"/>
+              </a:spcAft>
+            </a:pPr>
+            <a:r>
+              <a:rPr sz="1500">
+                <a:solidFill>
+                  <a:srgbClr val="22282E"/>
+                </a:solidFill>
+              </a:rPr>
+              <a:t>•  Pass-the-Hash — Autenticarse con el hash NTLM sin la contraseña en claro</a:t>
+            </a:r>
+          </a:p>
+          <a:p>
+            <a:pPr>
+              <a:spcAft>
+                <a:spcPts val="600"/>
+              </a:spcAft>
+            </a:pPr>
+            <a:r>
+              <a:rPr sz="1500">
+                <a:solidFill>
+                  <a:srgbClr val="22282E"/>
+                </a:solidFill>
+              </a:rPr>
+              <a:t>•  Reutilización de credenciales — Un administrador compartido abre muchas máquinas</a:t>
+            </a:r>
+          </a:p>
+          <a:p>
+            <a:pPr>
+              <a:spcAft>
+                <a:spcPts val="600"/>
+              </a:spcAft>
+            </a:pPr>
+            <a:r>
+              <a:rPr sz="1500">
+                <a:solidFill>
+                  <a:srgbClr val="22282E"/>
+                </a:solidFill>
+              </a:rPr>
+              <a:t>•  PsExec — Ejecución remota vía SMB creando un servicio temporal</a:t>
+            </a:r>
+          </a:p>
+          <a:p>
+            <a:pPr>
+              <a:spcAft>
+                <a:spcPts val="600"/>
+              </a:spcAft>
+            </a:pPr>
+            <a:r>
+              <a:rPr sz="1500">
+                <a:solidFill>
+                  <a:srgbClr val="22282E"/>
+                </a:solidFill>
+              </a:rPr>
+              <a:t>•  impacket — Suite de Python con implementaciones de PsExec, WMI, etc.</a:t>
             </a:r>
           </a:p>
         </p:txBody>
@@ -4674,7 +5020,7 @@
                   <a:srgbClr val="0B3D2E"/>
                 </a:solidFill>
               </a:rPr>
-              <a:t>✍️ Ejercicios</a:t>
+              <a:t>🧰 Herramientas y preparación</a:t>
             </a:r>
           </a:p>
         </p:txBody>
@@ -4712,82 +5058,97 @@
                   <a:srgbClr val="22282E"/>
                 </a:solidFill>
               </a:rPr>
-              <a:t>•  Explica con tus propias palabras por qué NTLM permite Pass-the-Hash y qué diferencia tiene frente a Kerberos en este aspecto.</a:t>
-            </a:r>
-          </a:p>
-          <a:p>
-            <a:pPr>
-              <a:spcAft>
-                <a:spcPts val="600"/>
-              </a:spcAft>
-            </a:pPr>
-            <a:r>
-              <a:rPr sz="1500">
-                <a:solidFill>
-                  <a:srgbClr val="22282E"/>
-                </a:solidFill>
-              </a:rPr>
-              <a:t>•  Compara PsExec y wmiexec en cuanto a artefactos forenses que dejan en el host destino.</a:t>
-            </a:r>
-          </a:p>
-          <a:p>
-            <a:pPr>
-              <a:spcAft>
-                <a:spcPts val="600"/>
-              </a:spcAft>
-            </a:pPr>
-            <a:r>
-              <a:rPr sz="1500">
-                <a:solidFill>
-                  <a:srgbClr val="22282E"/>
-                </a:solidFill>
-              </a:rPr>
-              <a:t>•  Usa CrackMapExec para determinar en qué hosts de tu laboratorio una cuenta específica es administrador local.</a:t>
-            </a:r>
-          </a:p>
-          <a:p>
-            <a:pPr>
-              <a:spcAft>
-                <a:spcPts val="600"/>
-              </a:spcAft>
-            </a:pPr>
-            <a:r>
-              <a:rPr sz="1500">
-                <a:solidFill>
-                  <a:srgbClr val="22282E"/>
-                </a:solidFill>
-              </a:rPr>
-              <a:t>•  Obtén una shell con evil-winrm y ejecuta whoami /priv para verificar los privilegios disponibles.</a:t>
-            </a:r>
-          </a:p>
-          <a:p>
-            <a:pPr>
-              <a:spcAft>
-                <a:spcPts val="600"/>
-              </a:spcAft>
-            </a:pPr>
-            <a:r>
-              <a:rPr sz="1500">
-                <a:solidFill>
-                  <a:srgbClr val="22282E"/>
-                </a:solidFill>
-              </a:rPr>
-              <a:t>•  Ejecuta secretsdump.py contra un host de laboratorio y explica qué contenidos obtienes (SAM, LSA secrets, cached domain credentials).</a:t>
-            </a:r>
-          </a:p>
-          <a:p>
-            <a:pPr>
-              <a:spcAft>
-                <a:spcPts val="600"/>
-              </a:spcAft>
-            </a:pPr>
-            <a:r>
-              <a:rPr sz="1500">
-                <a:solidFill>
-                  <a:srgbClr val="22282E"/>
-                </a:solidFill>
-              </a:rPr>
-              <a:t>•  Dibuja (a mano o con una herramienta de diagramas) una cadena de movimiento lateral de tres saltos y señala en qué punto un blue team podría detectarla.</a:t>
+              <a:t>•  Entorno de laboratorio: un mini-dominio Active Directory propio (un controlador de dominio y al menos dos estaciones de trabajo), montado en VMs propias o en un rango de laboratorio como los de…</a:t>
+            </a:r>
+          </a:p>
+          <a:p>
+            <a:pPr>
+              <a:spcAft>
+                <a:spcPts val="600"/>
+              </a:spcAft>
+            </a:pPr>
+            <a:r>
+              <a:rPr sz="1500">
+                <a:solidFill>
+                  <a:srgbClr val="22282E"/>
+                </a:solidFill>
+              </a:rPr>
+              <a:t>•  Impacket: pip install impacket o pipx install impacket; incluye psexec.py, wmiexec.py, smbexec.py y secretsdump.py.</a:t>
+            </a:r>
+          </a:p>
+          <a:p>
+            <a:pPr>
+              <a:spcAft>
+                <a:spcPts val="600"/>
+              </a:spcAft>
+            </a:pPr>
+            <a:r>
+              <a:rPr sz="1500">
+                <a:solidFill>
+                  <a:srgbClr val="22282E"/>
+                </a:solidFill>
+              </a:rPr>
+              <a:t>•  CrackMapExec (o su fork mantenido, NetExec): pip install crackmapexec o pip install netexec.</a:t>
+            </a:r>
+          </a:p>
+          <a:p>
+            <a:pPr>
+              <a:spcAft>
+                <a:spcPts val="600"/>
+              </a:spcAft>
+            </a:pPr>
+            <a:r>
+              <a:rPr sz="1500">
+                <a:solidFill>
+                  <a:srgbClr val="22282E"/>
+                </a:solidFill>
+              </a:rPr>
+              <a:t>•  evil-winrm: gem install evil-winrm, requiere Ruby instalado.</a:t>
+            </a:r>
+          </a:p>
+          <a:p>
+            <a:pPr>
+              <a:spcAft>
+                <a:spcPts val="600"/>
+              </a:spcAft>
+            </a:pPr>
+            <a:r>
+              <a:rPr sz="1500">
+                <a:solidFill>
+                  <a:srgbClr val="22282E"/>
+                </a:solidFill>
+              </a:rPr>
+              <a:t>•  Credenciales o hashes obtenidos de forma legítima en clases previas (por ejemplo, mediante secretsdump.py tras una escalada de privilegios autorizada).</a:t>
+            </a:r>
+          </a:p>
+          <a:p>
+            <a:pPr>
+              <a:spcAft>
+                <a:spcPts val="600"/>
+              </a:spcAft>
+            </a:pPr>
+            <a:r>
+              <a:rPr sz="1500">
+                <a:solidFill>
+                  <a:srgbClr val="22282E"/>
+                </a:solidFill>
+              </a:rPr>
+              <a:t>•  BloodHound + SharpHound/bloodhound-python: recolector de datos de AD (bloodhound-python -u user -p pass -d dominio.local -ns 10.10.10.5 -c all) y su interfaz de análisis en Neo4j.</a:t>
+            </a:r>
+          </a:p>
+          <a:p>
+            <a:pPr>
+              <a:spcAft>
+                <a:spcPts val="600"/>
+              </a:spcAft>
+            </a:pPr>
+            <a:r>
+              <a:rPr sz="1500">
+                <a:solidFill>
+                  <a:srgbClr val="22282E"/>
+                </a:solidFill>
+              </a:rPr>
+              <a:t>•  Wireshark o tcpdump (opcional): útil para observar en el laboratorio el tráfico SMB/WMI/WinRM generado por cada técnica y entender su huella en la red.</a:t>
             </a:r>
           </a:p>
         </p:txBody>
@@ -4838,7 +5199,7 @@
                   <a:srgbClr val="0B3D2E"/>
                 </a:solidFill>
               </a:rPr>
-              <a:t>📝 Reto verificable</a:t>
+              <a:t>🧪 Laboratorio guiado</a:t>
             </a:r>
           </a:p>
         </p:txBody>
@@ -4876,22 +5237,97 @@
                   <a:srgbClr val="22282E"/>
                 </a:solidFill>
               </a:rPr>
-              <a:t>•  Reto: en tu laboratorio de Active Directory propio, demuestra una cadena de movimiento lateral de al menos dos saltos partiendo de un host inicial comprometido.</a:t>
-            </a:r>
-          </a:p>
-          <a:p>
-            <a:pPr>
-              <a:spcAft>
-                <a:spcPts val="600"/>
-              </a:spcAft>
-            </a:pPr>
-            <a:r>
-              <a:rPr sz="1500">
-                <a:solidFill>
-                  <a:srgbClr val="22282E"/>
-                </a:solidFill>
-              </a:rPr>
-              <a:t>•  Criterio de aceptación: el alumno documenta los dos (o más) hosts alcanzados, la técnica exacta usada en cada salto (Pass-the-Hash con PsExec/WMI/WinRM), la credencial que permitió el salto, y una salida de verificación (whoami/hostname) capturada en cada host de la cadena.</a:t>
+              <a:t>•  Con un hash NTLM obtenido (formato LM:NT), valida en qué hosts de la subred la credencial es admin local: crackmapexec smb 192.168.56.0/24 -u administrador -H &lt;hashNT&gt;.</a:t>
+            </a:r>
+          </a:p>
+          <a:p>
+            <a:pPr>
+              <a:spcAft>
+                <a:spcPts val="600"/>
+              </a:spcAft>
+            </a:pPr>
+            <a:r>
+              <a:rPr sz="1500">
+                <a:solidFill>
+                  <a:srgbClr val="22282E"/>
+                </a:solidFill>
+              </a:rPr>
+              <a:t>•  Los hosts marcados con Pwn3d! confirman privilegios administrativos; anótalos como objetivos de movimiento lateral.</a:t>
+            </a:r>
+          </a:p>
+          <a:p>
+            <a:pPr>
+              <a:spcAft>
+                <a:spcPts val="600"/>
+              </a:spcAft>
+            </a:pPr>
+            <a:r>
+              <a:rPr sz="1500">
+                <a:solidFill>
+                  <a:srgbClr val="22282E"/>
+                </a:solidFill>
+              </a:rPr>
+              <a:t>•  Ejecuta un comando remoto de forma sigilosa con wmiexec: wmiexec.py -hashes :&lt;hashNT&gt; dominio/administrador@192.168.56.20.</a:t>
+            </a:r>
+          </a:p>
+          <a:p>
+            <a:pPr>
+              <a:spcAft>
+                <a:spcPts val="600"/>
+              </a:spcAft>
+            </a:pPr>
+            <a:r>
+              <a:rPr sz="1500">
+                <a:solidFill>
+                  <a:srgbClr val="22282E"/>
+                </a:solidFill>
+              </a:rPr>
+              <a:t>•  Alternativamente, usa PsExec (más ruidoso, deja un servicio): psexec.py dominio/administrador@192.168.56.20 -hashes :&lt;hashNT&gt;.</a:t>
+            </a:r>
+          </a:p>
+          <a:p>
+            <a:pPr>
+              <a:spcAft>
+                <a:spcPts val="600"/>
+              </a:spcAft>
+            </a:pPr>
+            <a:r>
+              <a:rPr sz="1500">
+                <a:solidFill>
+                  <a:srgbClr val="22282E"/>
+                </a:solidFill>
+              </a:rPr>
+              <a:t>•  Si el puerto 5985 está abierto, obtén una shell interactiva con evil-winrm: evil-winrm -i 192.168.56.20 -u administrador -H &lt;hashNT&gt;.</a:t>
+            </a:r>
+          </a:p>
+          <a:p>
+            <a:pPr>
+              <a:spcAft>
+                <a:spcPts val="600"/>
+              </a:spcAft>
+            </a:pPr>
+            <a:r>
+              <a:rPr sz="1500">
+                <a:solidFill>
+                  <a:srgbClr val="22282E"/>
+                </a:solidFill>
+              </a:rPr>
+              <a:t>•  Vuelca credenciales adicionales del nuevo host: secretsdump.py dominio/administrador@192.168.56.20 -hashes :&lt;hashNT&gt;.</a:t>
+            </a:r>
+          </a:p>
+          <a:p>
+            <a:pPr>
+              <a:spcAft>
+                <a:spcPts val="600"/>
+              </a:spcAft>
+            </a:pPr>
+            <a:r>
+              <a:rPr sz="1500">
+                <a:solidFill>
+                  <a:srgbClr val="22282E"/>
+                </a:solidFill>
+              </a:rPr>
+              <a:t>•  Con las credenciales recién obtenidas, repite el proceso hacia un tercer host para construir una cadena de al menos dos saltos.</a:t>
             </a:r>
           </a:p>
         </p:txBody>
